--- a/test/generator/baseline/gen.md.to.pptx.pptx
+++ b/test/generator/baseline/gen.md.to.pptx.pptx
@@ -1722,6 +1722,22 @@
                   <a:txBody>
                     <a:bodyPr/>
                     <a:lstStyle/>
+                    <a:p>
+                      <a:pPr>
+                        <a:buNone/>
+                      </a:pPr>
+                      <a:r>
+                        <a:rPr lang="en-US" sz="1200" dirty="0"/>
+                        <a:t>	</a:t>
+                      </a:r>
+                      <a:endParaRPr lang="en-US" sz="1200" dirty="0"/>
+                    </a:p>
+                    <a:p>
+                      <a:pPr>
+                        <a:buNone/>
+                      </a:pPr>
+                      <a:endParaRPr lang="en-US" sz="1200" dirty="0"/>
+                    </a:p>
                     <a:p>
                       <a:pPr>
                         <a:buNone/>

--- a/test/generator/baseline/gen.md.to.pptx.pptx
+++ b/test/generator/baseline/gen.md.to.pptx.pptx
@@ -9775,7 +9775,7 @@
       </p:sp>
       <p:pic>
         <p:nvPicPr>
-          <p:cNvPr id="3" name="Picture 3"/>
+          <p:cNvPr id="3" name="Picture 3" descr="165 Inspirational Quotes To Keep You Motivated In Life"/>
           <p:cNvPicPr>
             <a:picLocks noChangeAspect="1"/>
           </p:cNvPicPr>
@@ -10195,9 +10195,12 @@
           <a:lstStyle/>
           <a:p>
             <a:pPr marL="228600" indent="-177800">
-              <a:buFont typeface="+mj-lt"/>
-              <a:buAutoNum type="arabicPeriod"/>
+              <a:buNone/>
             </a:pPr>
+            <a:r>
+              <a:rPr lang="en-US" sz="1800" dirty="0"/>
+              <a:t>1.	</a:t>
+            </a:r>
             <a:r>
               <a:rPr lang="en-US" sz="1800" dirty="0"/>
               <a:t>One, with a very long line to demonstrate that the hanging indent for the list is working correctly</a:t>
@@ -10206,9 +10209,12 @@
           </a:p>
           <a:p>
             <a:pPr marL="228600" indent="-177800">
-              <a:buFont typeface="+mj-lt"/>
-              <a:buAutoNum type="arabicPeriod"/>
+              <a:buNone/>
             </a:pPr>
+            <a:r>
+              <a:rPr lang="en-US" sz="1800" dirty="0"/>
+              <a:t>2.	</a:t>
+            </a:r>
             <a:r>
               <a:rPr lang="en-US" sz="1800" dirty="0"/>
               <a:t>Two</a:t>
@@ -10304,9 +10310,12 @@
           <a:lstStyle/>
           <a:p>
             <a:pPr marL="228600" indent="-177800">
-              <a:buFont typeface="+mj-lt"/>
-              <a:buAutoNum type="arabicPeriod"/>
+              <a:buNone/>
             </a:pPr>
+            <a:r>
+              <a:rPr lang="en-US" sz="1800" dirty="0"/>
+              <a:t>1.	</a:t>
+            </a:r>
             <a:r>
               <a:rPr lang="en-US" sz="1800" dirty="0"/>
               <a:t>One</a:t>
@@ -10315,9 +10324,12 @@
           </a:p>
           <a:p>
             <a:pPr marL="457200" indent="-177800" lvl="1">
-              <a:buFont typeface="+mj-lt"/>
-              <a:buAutoNum type="arabicPeriod"/>
+              <a:buNone/>
             </a:pPr>
+            <a:r>
+              <a:rPr lang="en-US" sz="1800" dirty="0"/>
+              <a:t>1.	</a:t>
+            </a:r>
             <a:r>
               <a:rPr lang="en-US" sz="1800" dirty="0"/>
               <a:t>Two</a:t>
@@ -10326,9 +10338,12 @@
           </a:p>
           <a:p>
             <a:pPr marL="685800" indent="-177800" lvl="2">
-              <a:buFont typeface="+mj-lt"/>
-              <a:buAutoNum type="arabicPeriod"/>
+              <a:buNone/>
             </a:pPr>
+            <a:r>
+              <a:rPr lang="en-US" sz="1800" dirty="0"/>
+              <a:t>1.	</a:t>
+            </a:r>
             <a:r>
               <a:rPr lang="en-US" sz="1800" dirty="0"/>
               <a:t>Three</a:t>
@@ -10337,9 +10352,12 @@
           </a:p>
           <a:p>
             <a:pPr marL="685800" indent="-177800" lvl="2">
-              <a:buFont typeface="+mj-lt"/>
-              <a:buAutoNum type="arabicPeriod"/>
+              <a:buNone/>
             </a:pPr>
+            <a:r>
+              <a:rPr lang="en-US" sz="1800" dirty="0"/>
+              <a:t>2.	</a:t>
+            </a:r>
             <a:r>
               <a:rPr lang="en-US" sz="1800" dirty="0"/>
               <a:t>Four with a very long line to demonstrate that the hanging indent for the list is working correctly.</a:t>
@@ -10348,9 +10366,12 @@
           </a:p>
           <a:p>
             <a:pPr marL="685800" indent="-177800" lvl="2">
-              <a:buFont typeface="+mj-lt"/>
-              <a:buAutoNum type="arabicPeriod"/>
+              <a:buNone/>
             </a:pPr>
+            <a:r>
+              <a:rPr lang="en-US" sz="1800" dirty="0"/>
+              <a:t>3.	</a:t>
+            </a:r>
             <a:r>
               <a:rPr lang="en-US" sz="1800" dirty="0"/>
               <a:t>Five</a:t>
@@ -10359,9 +10380,12 @@
           </a:p>
           <a:p>
             <a:pPr marL="228600" indent="-177800">
-              <a:buFont typeface="+mj-lt"/>
-              <a:buAutoNum type="arabicPeriod"/>
+              <a:buNone/>
             </a:pPr>
+            <a:r>
+              <a:rPr lang="en-US" sz="1800" dirty="0"/>
+              <a:t>2.	</a:t>
+            </a:r>
             <a:r>
               <a:rPr lang="en-US" sz="1800" dirty="0"/>
               <a:t>Six</a:t>
@@ -10794,9 +10818,12 @@
           <a:lstStyle/>
           <a:p>
             <a:pPr marL="228600" indent="-177800">
-              <a:buFont typeface="+mj-lt"/>
-              <a:buAutoNum type="arabicPeriod"/>
+              <a:buNone/>
             </a:pPr>
+            <a:r>
+              <a:rPr lang="en-US" sz="1800" dirty="0"/>
+              <a:t>1.	</a:t>
+            </a:r>
             <a:r>
               <a:rPr lang="en-US" sz="1800" dirty="0"/>
               <a:t>One</a:t>
@@ -10805,9 +10832,12 @@
           </a:p>
           <a:p>
             <a:pPr marL="228600" indent="-177800">
-              <a:buFont typeface="+mj-lt"/>
-              <a:buAutoNum type="arabicPeriod"/>
+              <a:buNone/>
             </a:pPr>
+            <a:r>
+              <a:rPr lang="en-US" sz="1800" dirty="0"/>
+              <a:t>2.	</a:t>
+            </a:r>
             <a:r>
               <a:rPr lang="en-US" sz="1800" dirty="0"/>
               <a:t>Two</a:t>
@@ -10826,9 +10856,12 @@
           </a:p>
           <a:p>
             <a:pPr marL="228600" indent="-177800">
-              <a:buFont typeface="+mj-lt"/>
-              <a:buAutoNum type="arabicPeriod"/>
+              <a:buNone/>
             </a:pPr>
+            <a:r>
+              <a:rPr lang="en-US" sz="1800" dirty="0"/>
+              <a:t>3.	</a:t>
+            </a:r>
             <a:r>
               <a:rPr lang="en-US" sz="1800" dirty="0"/>
               <a:t>We now resume our normal programming</a:t>
@@ -10837,9 +10870,12 @@
           </a:p>
           <a:p>
             <a:pPr marL="228600" indent="-177800">
-              <a:buFont typeface="+mj-lt"/>
-              <a:buAutoNum type="arabicPeriod"/>
+              <a:buNone/>
             </a:pPr>
+            <a:r>
+              <a:rPr lang="en-US" sz="1800" dirty="0"/>
+              <a:t>4.	</a:t>
+            </a:r>
             <a:r>
               <a:rPr lang="en-US" sz="1800" dirty="0"/>
               <a:t>Four</a:t>
